--- a/BIS_RE_v2.pptx
+++ b/BIS_RE_v2.pptx
@@ -13118,8 +13118,8 @@
         </p:nvSpPr>
         <p:spPr>
           <a:xfrm>
-            <a:off x="0" y="3813048"/>
-            <a:ext cx="9144000" cy="1078992"/>
+            <a:off x="144897" y="3806190"/>
+            <a:ext cx="8918917" cy="1065276"/>
           </a:xfrm>
           <a:prstGeom prst="rect">
             <a:avLst/>
@@ -13210,9 +13210,6 @@
           <a:bodyPr wrap="square" lIns="0" tIns="0" rIns="0" bIns="0" rtlCol="0" anchor="ctr"/>
           <a:lstStyle/>
           <a:p>
-            <a:pPr marL="0" indent="0">
-              <a:buNone/>
-            </a:pPr>
             <a:r>
               <a:rPr lang="en-US" sz="900" dirty="0">
                 <a:solidFill>
@@ -13222,7 +13219,7 @@
                 <a:ea typeface="Consolas" pitchFamily="34" charset="-122"/>
                 <a:cs typeface="Consolas" pitchFamily="34" charset="-120"/>
               </a:rPr>
-              <a:t>🔗 github.com/urmikanrar2003-uk/BIS-STANDARD-RECOMMENDATION-ENGINE</a:t>
+              <a:t>🔗https://github.com/urmikanrar2003-uk/BIS-STANDARD-RECOMMENDATION-ENGINE</a:t>
             </a:r>
             <a:endParaRPr lang="en-US" sz="900" dirty="0"/>
           </a:p>
@@ -13236,22 +13233,19 @@
         </p:nvSpPr>
         <p:spPr>
           <a:xfrm>
-            <a:off x="365760" y="4636008"/>
-            <a:ext cx="5486400" cy="201168"/>
-          </a:xfrm>
-          <a:prstGeom prst="rect">
-            <a:avLst/>
-          </a:prstGeom>
-          <a:noFill/>
-          <a:ln/>
-        </p:spPr>
-        <p:txBody>
-          <a:bodyPr wrap="square" lIns="0" tIns="0" rIns="0" bIns="0" rtlCol="0" anchor="ctr"/>
-          <a:lstStyle/>
-          <a:p>
-            <a:pPr marL="0" indent="0">
-              <a:buNone/>
-            </a:pPr>
+            <a:off x="163888" y="4683134"/>
+            <a:ext cx="5432943" cy="90737"/>
+          </a:xfrm>
+          <a:prstGeom prst="rect">
+            <a:avLst/>
+          </a:prstGeom>
+          <a:noFill/>
+          <a:ln/>
+        </p:spPr>
+        <p:txBody>
+          <a:bodyPr wrap="square" lIns="0" tIns="0" rIns="0" bIns="0" rtlCol="0" anchor="ctr"/>
+          <a:lstStyle/>
+          <a:p>
             <a:r>
               <a:rPr lang="en-US" sz="850" dirty="0">
                 <a:solidFill>
@@ -13261,7 +13255,35 @@
                 <a:ea typeface="Calibri" pitchFamily="34" charset="-122"/>
                 <a:cs typeface="Calibri" pitchFamily="34" charset="-120"/>
               </a:rPr>
-              <a:t>🌐 Live demo: streamlit.app  ·  0.02s avg latency  ·  MRR 1.0  ·  Hit Rate 100%</a:t>
+              <a:t>🌐 Live demo</a:t>
+            </a:r>
+            <a:r>
+              <a:rPr lang="en-US" sz="700" dirty="0">
+                <a:solidFill>
+                  <a:srgbClr val="14B8A6"/>
+                </a:solidFill>
+                <a:latin typeface="Calibri" pitchFamily="34" charset="0"/>
+                <a:ea typeface="Calibri" pitchFamily="34" charset="-122"/>
+                <a:cs typeface="Calibri" pitchFamily="34" charset="-120"/>
+              </a:rPr>
+              <a:t>: </a:t>
+            </a:r>
+            <a:r>
+              <a:rPr lang="en-IN" sz="700" u="sng" dirty="0">
+                <a:hlinkClick r:id="rId3"/>
+              </a:rPr>
+              <a:t>https://bis-standard-recommendation-engine-gybzddvzi4rrezbzbpcdak.streamlit.app/</a:t>
+            </a:r>
+            <a:r>
+              <a:rPr lang="en-US" sz="850" dirty="0">
+                <a:solidFill>
+                  <a:srgbClr val="14B8A6"/>
+                </a:solidFill>
+                <a:latin typeface="Calibri" pitchFamily="34" charset="0"/>
+                <a:ea typeface="Calibri" pitchFamily="34" charset="-122"/>
+                <a:cs typeface="Calibri" pitchFamily="34" charset="-120"/>
+              </a:rPr>
+              <a:t>·  0.02s avg latency  ·  MRR 1.0  ·  Hit Rate 100%</a:t>
             </a:r>
             <a:endParaRPr lang="en-US" sz="850" dirty="0"/>
           </a:p>
